--- a/Quadro_Aulas_Report_2026-06-25.pptx
+++ b/Quadro_Aulas_Report_2026-06-25.pptx
@@ -1038,7 +1038,7 @@
                   <a:srgbClr val="8FA3C0"/>
                 </a:solidFill>
               </a:rPr>
-              <a:t>25 de Junho de 2026 as 08:30</a:t>
+              <a:t>25 de Junho de 2026 as 09:53</a:t>
             </a:r>
             <a:endParaRPr lang="en-US" sz="700" dirty="0"/>
           </a:p>

--- a/Quadro_Aulas_Report_2026-06-25.pptx
+++ b/Quadro_Aulas_Report_2026-06-25.pptx
@@ -1038,7 +1038,7 @@
                   <a:srgbClr val="8FA3C0"/>
                 </a:solidFill>
               </a:rPr>
-              <a:t>25 de Junho de 2026 as 09:53</a:t>
+              <a:t>25 de Junho de 2026 as 16:44</a:t>
             </a:r>
             <a:endParaRPr lang="en-US" sz="700" dirty="0"/>
           </a:p>
@@ -1135,7 +1135,7 @@
                   <a:srgbClr val="FFFFFF"/>
                 </a:solidFill>
               </a:rPr>
-              <a:t>394</a:t>
+              <a:t>391</a:t>
             </a:r>
             <a:endParaRPr lang="en-US" sz="2400" dirty="0"/>
           </a:p>
@@ -1207,7 +1207,7 @@
                   <a:srgbClr val="4ADE80"/>
                 </a:solidFill>
               </a:rPr>
-              <a:t>327</a:t>
+              <a:t>329</a:t>
             </a:r>
             <a:endParaRPr lang="en-US" sz="2400" dirty="0"/>
           </a:p>
@@ -1351,7 +1351,7 @@
                   <a:srgbClr val="F87171"/>
                 </a:solidFill>
               </a:rPr>
-              <a:t>41</a:t>
+              <a:t>37</a:t>
             </a:r>
             <a:endParaRPr lang="en-US" sz="2400" dirty="0"/>
           </a:p>
@@ -1427,7 +1427,7 @@
         <p:spPr>
           <a:xfrm>
             <a:off x="137160" y="3538728"/>
-            <a:ext cx="1707642" cy="91440"/>
+            <a:ext cx="1728216" cy="91440"/>
           </a:xfrm>
           <a:prstGeom prst="rect">
             <a:avLst/>
@@ -1473,7 +1473,7 @@
                   <a:srgbClr val="8FA3C0"/>
                 </a:solidFill>
               </a:rPr>
-              <a:t>83% concluido  .  327 de 394 itens</a:t>
+              <a:t>84% concluido  .  329 de 391 itens</a:t>
             </a:r>
             <a:endParaRPr lang="en-US" sz="700" dirty="0"/>
           </a:p>
@@ -2227,7 +2227,7 @@
                   <a:srgbClr val="222222"/>
                 </a:solidFill>
               </a:rPr>
-              <a:t>7 Stories · 4 NFT · 111 itens</a:t>
+              <a:t>7 Stories · 4 NFT · 109 itens</a:t>
             </a:r>
             <a:endParaRPr lang="en-US" sz="750" dirty="0"/>
           </a:p>
@@ -2263,7 +2263,7 @@
                   <a:srgbClr val="222222"/>
                 </a:solidFill>
               </a:rPr>
-              <a:t>A Fazer: 11 . Em progresso: 1 . Finalizados: 99</a:t>
+              <a:t>A Fazer: 8 . Em progresso: 1 . Finalizados: 100</a:t>
             </a:r>
             <a:endParaRPr lang="en-US" sz="750" dirty="0"/>
           </a:p>
@@ -2299,7 +2299,7 @@
                   <a:srgbClr val="222222"/>
                 </a:solidFill>
               </a:rPr>
-              <a:t>Est: 427.5h . Real: 526.8h . Rem: 27.5h</a:t>
+              <a:t>Est: 425.5h . Real: 526.8h . Rem: 24.5h</a:t>
             </a:r>
             <a:endParaRPr lang="en-US" sz="750" dirty="0"/>
           </a:p>
@@ -2339,7 +2339,7 @@
         <p:spPr>
           <a:xfrm>
             <a:off x="4946904" y="859536"/>
-            <a:ext cx="1807037" cy="50292"/>
+            <a:ext cx="2005371" cy="50292"/>
           </a:xfrm>
           <a:prstGeom prst="rect">
             <a:avLst/>
@@ -2385,7 +2385,7 @@
                   <a:srgbClr val="888888"/>
                 </a:solidFill>
               </a:rPr>
-              <a:t>Stories/NFTs: 82% · 9 de 11</a:t>
+              <a:t>Stories/NFTs: 91% · 10 de 11</a:t>
             </a:r>
             <a:endParaRPr lang="en-US" sz="650" dirty="0"/>
           </a:p>
@@ -2425,7 +2425,7 @@
         <p:spPr>
           <a:xfrm>
             <a:off x="4946904" y="1033272"/>
-            <a:ext cx="1961297" cy="50292"/>
+            <a:ext cx="2027408" cy="50292"/>
           </a:xfrm>
           <a:prstGeom prst="rect">
             <a:avLst/>
@@ -2471,7 +2471,7 @@
                   <a:srgbClr val="888888"/>
                 </a:solidFill>
               </a:rPr>
-              <a:t>Subs: 89% · 99 de 111</a:t>
+              <a:t>Subs: 92% · 100 de 109</a:t>
             </a:r>
             <a:endParaRPr lang="en-US" sz="650" dirty="0"/>
           </a:p>
@@ -2507,7 +2507,7 @@
                   <a:srgbClr val="DC2626"/>
                 </a:solidFill>
               </a:rPr>
-              <a:t>Projetado: 554.3h (+126.8h / +30%)</a:t>
+              <a:t>Projetado: 551.3h (+125.8h / +30%)</a:t>
             </a:r>
             <a:endParaRPr lang="en-US" sz="800" dirty="0"/>
           </a:p>
@@ -3501,7 +3501,7 @@
                   <a:srgbClr val="222222"/>
                 </a:solidFill>
               </a:rPr>
-              <a:t>1251h</a:t>
+              <a:t>1249h</a:t>
             </a:r>
             <a:endParaRPr lang="en-US" sz="2400" dirty="0"/>
           </a:p>
@@ -3767,7 +3767,7 @@
                   <a:srgbClr val="F87171"/>
                 </a:solidFill>
               </a:rPr>
-              <a:t>139.5h</a:t>
+              <a:t>136.5h</a:t>
             </a:r>
             <a:endParaRPr lang="en-US" sz="2400" dirty="0"/>
           </a:p>
@@ -3900,7 +3900,7 @@
                   <a:srgbClr val="D97706"/>
                 </a:solidFill>
               </a:rPr>
-              <a:t>+156.9h</a:t>
+              <a:t>+155.9h</a:t>
             </a:r>
             <a:endParaRPr lang="en-US" sz="2400" dirty="0"/>
           </a:p>
@@ -3936,7 +3936,7 @@
                   <a:srgbClr val="888888"/>
                 </a:solidFill>
               </a:rPr>
-              <a:t>projetado: 1407.9h (+13%)</a:t>
+              <a:t>projetado: 1404.9h (+12%)</a:t>
             </a:r>
             <a:endParaRPr lang="en-US" sz="700" dirty="0"/>
           </a:p>
@@ -3951,7 +3951,7 @@
         <p:spPr>
           <a:xfrm>
             <a:off x="2441448" y="2916936"/>
-            <a:ext cx="8691067" cy="54864"/>
+            <a:ext cx="8709626" cy="54864"/>
           </a:xfrm>
           <a:prstGeom prst="rect">
             <a:avLst/>
@@ -3975,8 +3975,8 @@
         </p:nvSpPr>
         <p:spPr>
           <a:xfrm>
-            <a:off x="11132515" y="2916936"/>
-            <a:ext cx="955853" cy="54864"/>
+            <a:off x="11151074" y="2916936"/>
+            <a:ext cx="937294" cy="54864"/>
           </a:xfrm>
           <a:prstGeom prst="rect">
             <a:avLst/>
@@ -4117,7 +4117,7 @@
                   <a:srgbClr val="0F6E56"/>
                 </a:solidFill>
               </a:rPr>
-              <a:t>93% concluido</a:t>
+              <a:t>95% concluido</a:t>
             </a:r>
             <a:endParaRPr lang="en-US" sz="650" dirty="0"/>
           </a:p>
@@ -4157,7 +4157,7 @@
         <p:spPr>
           <a:xfrm>
             <a:off x="2551176" y="3291840"/>
-            <a:ext cx="4239204" cy="64008"/>
+            <a:ext cx="4330370" cy="64008"/>
           </a:xfrm>
           <a:prstGeom prst="rect">
             <a:avLst/>
@@ -6299,7 +6299,7 @@
                   <a:srgbClr val="FFFFFF"/>
                 </a:solidFill>
               </a:rPr>
-              <a:t>131</a:t>
+              <a:t>128</a:t>
             </a:r>
             <a:endParaRPr lang="en-US" sz="650" dirty="0"/>
           </a:p>
@@ -6349,7 +6349,7 @@
                   <a:srgbClr val="222222"/>
                 </a:solidFill>
               </a:rPr>
-              <a:t>131 itens criados pos 01/05</a:t>
+              <a:t>128 itens criados pos 01/05</a:t>
             </a:r>
             <a:endParaRPr lang="en-US" sz="750" dirty="0"/>
           </a:p>
@@ -6385,7 +6385,7 @@
                   <a:srgbClr val="222222"/>
                 </a:solidFill>
               </a:rPr>
-              <a:t>Princ +55h · Redund +164h · Obs +18h</a:t>
+              <a:t>Princ +55h · Redund +162h · Obs +18h</a:t>
             </a:r>
             <a:endParaRPr lang="en-US" sz="750" dirty="0"/>
           </a:p>
@@ -8357,7 +8357,7 @@
                   <a:srgbClr val="1D9E75"/>
                 </a:solidFill>
               </a:rPr>
-              <a:t>124h · 88 subs finalizadas</a:t>
+              <a:t>124h · 89 subs finalizadas</a:t>
             </a:r>
             <a:endParaRPr lang="en-US" sz="950" dirty="0"/>
           </a:p>

--- a/Quadro_Aulas_Report_2026-06-25.pptx
+++ b/Quadro_Aulas_Report_2026-06-25.pptx
@@ -1038,7 +1038,7 @@
                   <a:srgbClr val="8FA3C0"/>
                 </a:solidFill>
               </a:rPr>
-              <a:t>25 de Junho de 2026 as 16:44</a:t>
+              <a:t>25 de Junho de 2026 as 17:24</a:t>
             </a:r>
             <a:endParaRPr lang="en-US" sz="700" dirty="0"/>
           </a:p>

--- a/Quadro_Aulas_Report_2026-06-25.pptx
+++ b/Quadro_Aulas_Report_2026-06-25.pptx
@@ -1038,7 +1038,7 @@
                   <a:srgbClr val="8FA3C0"/>
                 </a:solidFill>
               </a:rPr>
-              <a:t>25 de Junho de 2026 as 17:24</a:t>
+              <a:t>25 de Junho de 2026 as 17:37</a:t>
             </a:r>
             <a:endParaRPr lang="en-US" sz="700" dirty="0"/>
           </a:p>

--- a/Quadro_Aulas_Report_2026-06-25.pptx
+++ b/Quadro_Aulas_Report_2026-06-25.pptx
@@ -1038,7 +1038,7 @@
                   <a:srgbClr val="8FA3C0"/>
                 </a:solidFill>
               </a:rPr>
-              <a:t>25 de Junho de 2026 as 17:37</a:t>
+              <a:t>25 de Junho de 2026 as 17:38</a:t>
             </a:r>
             <a:endParaRPr lang="en-US" sz="700" dirty="0"/>
           </a:p>

--- a/Quadro_Aulas_Report_2026-06-25.pptx
+++ b/Quadro_Aulas_Report_2026-06-25.pptx
@@ -1038,7 +1038,7 @@
                   <a:srgbClr val="8FA3C0"/>
                 </a:solidFill>
               </a:rPr>
-              <a:t>25 de Junho de 2026 as 17:38</a:t>
+              <a:t>25 de Junho de 2026 as 17:52</a:t>
             </a:r>
             <a:endParaRPr lang="en-US" sz="700" dirty="0"/>
           </a:p>
@@ -1818,7 +1818,7 @@
                   <a:srgbClr val="222222"/>
                 </a:solidFill>
               </a:rPr>
-              <a:t>5 Stories · 3 NFT · 69 itens</a:t>
+              <a:t>5 Stories · 3 NFT · 70 itens</a:t>
             </a:r>
             <a:endParaRPr lang="en-US" sz="750" dirty="0"/>
           </a:p>
@@ -1854,7 +1854,7 @@
                   <a:srgbClr val="222222"/>
                 </a:solidFill>
               </a:rPr>
-              <a:t>A Fazer: 1 . Em progresso: 0 . Finalizados: 68</a:t>
+              <a:t>A Fazer: 1 . Em progresso: 0 . Finalizados: 69</a:t>
             </a:r>
             <a:endParaRPr lang="en-US" sz="750" dirty="0"/>
           </a:p>
@@ -1890,7 +1890,7 @@
                   <a:srgbClr val="222222"/>
                 </a:solidFill>
               </a:rPr>
-              <a:t>Est: 274h . Real: 268.8h . Rem: 1h</a:t>
+              <a:t>Est: 274h . Real: 279.8h . Rem: 1h</a:t>
             </a:r>
             <a:endParaRPr lang="en-US" sz="750" dirty="0"/>
           </a:p>
@@ -2062,7 +2062,7 @@
                   <a:srgbClr val="888888"/>
                 </a:solidFill>
               </a:rPr>
-              <a:t>Subs: 99% · 68 de 69</a:t>
+              <a:t>Subs: 99% · 69 de 70</a:t>
             </a:r>
             <a:endParaRPr lang="en-US" sz="650" dirty="0"/>
           </a:p>
@@ -2098,7 +2098,7 @@
                   <a:srgbClr val="1D9E75"/>
                 </a:solidFill>
               </a:rPr>
-              <a:t>Projetado: 269.8h (-4.2h / -2%)</a:t>
+              <a:t>Projetado: 280.8h (+6.8h / +2%)</a:t>
             </a:r>
             <a:endParaRPr lang="en-US" sz="800" dirty="0"/>
           </a:p>
@@ -2227,7 +2227,7 @@
                   <a:srgbClr val="222222"/>
                 </a:solidFill>
               </a:rPr>
-              <a:t>7 Stories · 4 NFT · 109 itens</a:t>
+              <a:t>7 Stories · 4 NFT · 114 itens</a:t>
             </a:r>
             <a:endParaRPr lang="en-US" sz="750" dirty="0"/>
           </a:p>
@@ -2263,7 +2263,7 @@
                   <a:srgbClr val="222222"/>
                 </a:solidFill>
               </a:rPr>
-              <a:t>A Fazer: 8 . Em progresso: 1 . Finalizados: 100</a:t>
+              <a:t>A Fazer: 8 . Em progresso: 1 . Finalizados: 105</a:t>
             </a:r>
             <a:endParaRPr lang="en-US" sz="750" dirty="0"/>
           </a:p>
@@ -2299,7 +2299,7 @@
                   <a:srgbClr val="222222"/>
                 </a:solidFill>
               </a:rPr>
-              <a:t>Est: 425.5h . Real: 526.8h . Rem: 24.5h</a:t>
+              <a:t>Est: 432.5h . Real: 560.3h . Rem: 24.5h</a:t>
             </a:r>
             <a:endParaRPr lang="en-US" sz="750" dirty="0"/>
           </a:p>
@@ -2471,7 +2471,7 @@
                   <a:srgbClr val="888888"/>
                 </a:solidFill>
               </a:rPr>
-              <a:t>Subs: 92% · 100 de 109</a:t>
+              <a:t>Subs: 92% · 105 de 114</a:t>
             </a:r>
             <a:endParaRPr lang="en-US" sz="650" dirty="0"/>
           </a:p>
@@ -2507,7 +2507,7 @@
                   <a:srgbClr val="DC2626"/>
                 </a:solidFill>
               </a:rPr>
-              <a:t>Projetado: 551.3h (+125.8h / +30%)</a:t>
+              <a:t>Projetado: 584.8h (+152.3h / +35%)</a:t>
             </a:r>
             <a:endParaRPr lang="en-US" sz="800" dirty="0"/>
           </a:p>
@@ -3081,7 +3081,7 @@
                   <a:srgbClr val="222222"/>
                 </a:solidFill>
               </a:rPr>
-              <a:t>17 Stories · 120 itens</a:t>
+              <a:t>17 Stories · 124 itens</a:t>
             </a:r>
             <a:endParaRPr lang="en-US" sz="750" dirty="0"/>
           </a:p>
@@ -3117,7 +3117,7 @@
                   <a:srgbClr val="222222"/>
                 </a:solidFill>
               </a:rPr>
-              <a:t>A Fazer: 27 . Em progresso: 5 . Finalizados: 88</a:t>
+              <a:t>A Fazer: 27 . Em progresso: 5 . Finalizados: 92</a:t>
             </a:r>
             <a:endParaRPr lang="en-US" sz="750" dirty="0"/>
           </a:p>
@@ -3153,7 +3153,7 @@
                   <a:srgbClr val="222222"/>
                 </a:solidFill>
               </a:rPr>
-              <a:t>Est: 497.5h . Real: 255.8h . Rem: 111h</a:t>
+              <a:t>Est: 499.5h . Real: 264.8h . Rem: 111h</a:t>
             </a:r>
             <a:endParaRPr lang="en-US" sz="750" dirty="0"/>
           </a:p>
@@ -3279,7 +3279,7 @@
         <p:spPr>
           <a:xfrm>
             <a:off x="9811512" y="1033272"/>
-            <a:ext cx="1608704" cy="50292"/>
+            <a:ext cx="1630741" cy="50292"/>
           </a:xfrm>
           <a:prstGeom prst="rect">
             <a:avLst/>
@@ -3325,7 +3325,7 @@
                   <a:srgbClr val="888888"/>
                 </a:solidFill>
               </a:rPr>
-              <a:t>Subs: 73% · 88 de 120</a:t>
+              <a:t>Subs: 74% · 92 de 124</a:t>
             </a:r>
             <a:endParaRPr lang="en-US" sz="650" dirty="0"/>
           </a:p>
@@ -3361,7 +3361,7 @@
                   <a:srgbClr val="1D9E75"/>
                 </a:solidFill>
               </a:rPr>
-              <a:t>Projetado: 366.8h (-130.7h / -26%)</a:t>
+              <a:t>Projetado: 375.8h (-123.7h / -25%)</a:t>
             </a:r>
             <a:endParaRPr lang="en-US" sz="800" dirty="0"/>
           </a:p>
@@ -4589,7 +4589,7 @@
                   <a:srgbClr val="991B1B"/>
                 </a:solidFill>
               </a:rPr>
-              <a:t>73% concluido</a:t>
+              <a:t>74% concluido</a:t>
             </a:r>
             <a:endParaRPr lang="en-US" sz="650" dirty="0"/>
           </a:p>
@@ -4629,7 +4629,7 @@
         <p:spPr>
           <a:xfrm>
             <a:off x="7420356" y="3291840"/>
-            <a:ext cx="3327547" cy="64008"/>
+            <a:ext cx="3373130" cy="64008"/>
           </a:xfrm>
           <a:prstGeom prst="rect">
             <a:avLst/>
@@ -6385,7 +6385,7 @@
                   <a:srgbClr val="222222"/>
                 </a:solidFill>
               </a:rPr>
-              <a:t>Princ +55h · Redund +162h · Obs +18h</a:t>
+              <a:t>Princ +55h · Redund +169h · Obs +20h</a:t>
             </a:r>
             <a:endParaRPr lang="en-US" sz="750" dirty="0"/>
           </a:p>

--- a/Quadro_Aulas_Report_2026-06-25.pptx
+++ b/Quadro_Aulas_Report_2026-06-25.pptx
@@ -1038,7 +1038,7 @@
                   <a:srgbClr val="8FA3C0"/>
                 </a:solidFill>
               </a:rPr>
-              <a:t>25 de Junho de 2026 as 17:52</a:t>
+              <a:t>25 de Junho de 2026 as 17:57</a:t>
             </a:r>
             <a:endParaRPr lang="en-US" sz="700" dirty="0"/>
           </a:p>

--- a/Quadro_Aulas_Report_2026-06-25.pptx
+++ b/Quadro_Aulas_Report_2026-06-25.pptx
@@ -1038,7 +1038,7 @@
                   <a:srgbClr val="8FA3C0"/>
                 </a:solidFill>
               </a:rPr>
-              <a:t>25 de Junho de 2026 as 17:57</a:t>
+              <a:t>25 de Junho de 2026 as 17:59</a:t>
             </a:r>
             <a:endParaRPr lang="en-US" sz="700" dirty="0"/>
           </a:p>
@@ -3081,7 +3081,7 @@
                   <a:srgbClr val="222222"/>
                 </a:solidFill>
               </a:rPr>
-              <a:t>17 Stories · 124 itens</a:t>
+              <a:t>17 Stories · 1 NFT · 124 itens</a:t>
             </a:r>
             <a:endParaRPr lang="en-US" sz="750" dirty="0"/>
           </a:p>
@@ -3239,7 +3239,7 @@
                   <a:srgbClr val="888888"/>
                 </a:solidFill>
               </a:rPr>
-              <a:t>Stories/NFTs: 0% · 0 de 17</a:t>
+              <a:t>Stories/NFTs: 0% · 0 de 18</a:t>
             </a:r>
             <a:endParaRPr lang="en-US" sz="650" dirty="0"/>
           </a:p>
